--- a/week-07/presentations/ppts/day-05-removing-delivery-bottlenecks.pptx
+++ b/week-07/presentations/ppts/day-05-removing-delivery-bottlenecks.pptx
@@ -5947,7 +5947,7 @@
             </a:pPr>
             <a:r>
               <a:rPr/>
-              <a:t>A real-world capstone (not FieldPulse)</a:t>
+              <a:t>A capstone subject (FieldPulse or your own project)</a:t>
             </a:r>
           </a:p>
           <a:p>
@@ -6055,7 +6055,7 @@
             </a:pPr>
             <a:r>
               <a:rPr/>
-              <a:t>Different enough from FieldPulse to test transferability</a:t>
+              <a:t>Clear problem you can state in one sentence</a:t>
             </a:r>
           </a:p>
           <a:p>
@@ -6337,7 +6337,7 @@
             </a:pPr>
             <a:r>
               <a:rPr/>
-              <a:t>Real-world capstone subject</a:t>
+              <a:t>Capstone subject (FieldPulse or your own)</a:t>
             </a:r>
           </a:p>
           <a:p>

--- a/week-07/presentations/ppts/day-05-removing-delivery-bottlenecks.pptx
+++ b/week-07/presentations/ppts/day-05-removing-delivery-bottlenecks.pptx
@@ -5134,25 +5134,25 @@
             </a:pPr>
             <a:r>
               <a:rPr/>
-              <a:t>§1 outcomes ↔ §2 backlog</a:t>
-            </a:r>
-          </a:p>
-          <a:p>
-            <a:pPr lvl="0" indent="0" marL="0">
-              <a:buNone/>
-            </a:pPr>
-            <a:r>
-              <a:rPr/>
-              <a:t>Every output in §2 maps to an outcome in §1</a:t>
-            </a:r>
-          </a:p>
-          <a:p>
-            <a:pPr lvl="0" indent="0" marL="0">
-              <a:buNone/>
-            </a:pPr>
-            <a:r>
-              <a:rPr/>
-              <a:t>§2 backlog ↔ §3 tracking</a:t>
+              <a:t>Section 1 outcomes ↔ Section 2 backlog</a:t>
+            </a:r>
+          </a:p>
+          <a:p>
+            <a:pPr lvl="0" indent="0" marL="0">
+              <a:buNone/>
+            </a:pPr>
+            <a:r>
+              <a:rPr/>
+              <a:t>Every output in Section 2 maps to an outcome in Section 1</a:t>
+            </a:r>
+          </a:p>
+          <a:p>
+            <a:pPr lvl="0" indent="0" marL="0">
+              <a:buNone/>
+            </a:pPr>
+            <a:r>
+              <a:rPr/>
+              <a:t>Section 2 backlog ↔ Section 3 tracking</a:t>
             </a:r>
           </a:p>
           <a:p>
@@ -5170,7 +5170,7 @@
             </a:pPr>
             <a:r>
               <a:rPr/>
-              <a:t>§3 tracking ↔ §4 VSM</a:t>
+              <a:t>Section 3 tracking ↔ Section 4 VSM</a:t>
             </a:r>
           </a:p>
           <a:p>
@@ -5188,7 +5188,7 @@
             </a:pPr>
             <a:r>
               <a:rPr/>
-              <a:t>§4 queues ↔ §5 experiments</a:t>
+              <a:t>Section 4 queues ↔ Section 5 experiments</a:t>
             </a:r>
           </a:p>
           <a:p>
@@ -6265,43 +6265,43 @@
             </a:pPr>
             <a:r>
               <a:rPr/>
-              <a:t>Outcome map (DP §1)</a:t>
-            </a:r>
-          </a:p>
-          <a:p>
-            <a:pPr lvl="0" indent="0" marL="0">
-              <a:buNone/>
-            </a:pPr>
-            <a:r>
-              <a:rPr/>
-              <a:t>Loaded ADO backlog (§2)</a:t>
-            </a:r>
-          </a:p>
-          <a:p>
-            <a:pPr lvl="0" indent="0" marL="0">
-              <a:buNone/>
-            </a:pPr>
-            <a:r>
-              <a:rPr/>
-              <a:t>Tracking plan (§3)</a:t>
-            </a:r>
-          </a:p>
-          <a:p>
-            <a:pPr lvl="0" indent="0" marL="0">
-              <a:buNone/>
-            </a:pPr>
-            <a:r>
-              <a:rPr/>
-              <a:t>Value stream map (§4)</a:t>
-            </a:r>
-          </a:p>
-          <a:p>
-            <a:pPr lvl="0" indent="0" marL="0">
-              <a:buNone/>
-            </a:pPr>
-            <a:r>
-              <a:rPr/>
-              <a:t>Bottleneck experiments (§5)</a:t>
+              <a:t>Outcome map (DP Section 1)</a:t>
+            </a:r>
+          </a:p>
+          <a:p>
+            <a:pPr lvl="0" indent="0" marL="0">
+              <a:buNone/>
+            </a:pPr>
+            <a:r>
+              <a:rPr/>
+              <a:t>Loaded ADO backlog (Section 2)</a:t>
+            </a:r>
+          </a:p>
+          <a:p>
+            <a:pPr lvl="0" indent="0" marL="0">
+              <a:buNone/>
+            </a:pPr>
+            <a:r>
+              <a:rPr/>
+              <a:t>Tracking plan (Section 3)</a:t>
+            </a:r>
+          </a:p>
+          <a:p>
+            <a:pPr lvl="0" indent="0" marL="0">
+              <a:buNone/>
+            </a:pPr>
+            <a:r>
+              <a:rPr/>
+              <a:t>Value stream map (Section 4)</a:t>
+            </a:r>
+          </a:p>
+          <a:p>
+            <a:pPr lvl="0" indent="0" marL="0">
+              <a:buNone/>
+            </a:pPr>
+            <a:r>
+              <a:rPr/>
+              <a:t>Bottleneck experiments (Section 5)</a:t>
             </a:r>
           </a:p>
           <a:p>
@@ -6604,7 +6604,7 @@
             </a:pPr>
             <a:r>
               <a:rPr/>
-              <a:t>Run the integration pass across DP §§1–5</a:t>
+              <a:t>Run the integration pass across DP Sections 1–5</a:t>
             </a:r>
           </a:p>
           <a:p>
@@ -6739,7 +6739,7 @@
             </a:pPr>
             <a:r>
               <a:rPr/>
-              <a:t>Pin DP §§1–4</a:t>
+              <a:t>Pin DP Sections 1–4</a:t>
             </a:r>
           </a:p>
           <a:p>
@@ -7270,7 +7270,7 @@
             </a:pPr>
             <a:r>
               <a:rPr b="1"/>
-              <a:t>§§1–5 reads coherently top to bottom</a:t>
+              <a:t>Sections 1–5 reads coherently top to bottom</a:t>
             </a:r>
           </a:p>
         </p:txBody>

--- a/week-07/presentations/ppts/day-05-removing-delivery-bottlenecks.pptx
+++ b/week-07/presentations/ppts/day-05-removing-delivery-bottlenecks.pptx
@@ -5116,6 +5116,15 @@
             </a:pPr>
             <a:r>
               <a:rPr/>
+              <a:t>The integration pass verifies Sections 1–5 cohere, including the value stream mapping (VSM).</a:t>
+            </a:r>
+          </a:p>
+          <a:p>
+            <a:pPr lvl="0" indent="0" marL="0">
+              <a:buNone/>
+            </a:pPr>
+            <a:r>
+              <a:rPr/>
               <a:t>Check</a:t>
             </a:r>
           </a:p>
@@ -5893,7 +5902,7 @@
             </a:pPr>
             <a:r>
               <a:rPr/>
-              <a:t>Artifact templates (PRD/TCD/TMD/SEP/DP) — in shorter form</a:t>
+              <a:t>Artifact templates — Product Requirements Document (PRD), Technical Concept Document (TCD), Technical Modeling Document (TMD), Stakeholder Engagement Plan (SEP), DP — in shorter form</a:t>
             </a:r>
           </a:p>
           <a:p>
@@ -6064,7 +6073,7 @@
             </a:pPr>
             <a:r>
               <a:rPr/>
-              <a:t>Public-discussable (no NDA conflicts)</a:t>
+              <a:t>Public-discussable (no non-disclosure agreement (NDA) conflicts)</a:t>
             </a:r>
           </a:p>
         </p:txBody>
@@ -6274,7 +6283,7 @@
             </a:pPr>
             <a:r>
               <a:rPr/>
-              <a:t>Loaded ADO backlog (Section 2)</a:t>
+              <a:t>Loaded Azure DevOps (ADO) backlog (Section 2)</a:t>
             </a:r>
           </a:p>
           <a:p>
@@ -6604,7 +6613,7 @@
             </a:pPr>
             <a:r>
               <a:rPr/>
-              <a:t>Run the integration pass across DP Sections 1–5</a:t>
+              <a:t>Run the integration pass across Delivery Plan (DP) Sections 1–5</a:t>
             </a:r>
           </a:p>
           <a:p>

--- a/week-07/presentations/ppts/day-05-removing-delivery-bottlenecks.pptx
+++ b/week-07/presentations/ppts/day-05-removing-delivery-bottlenecks.pptx
@@ -953,7 +953,7 @@
             </a:pPr>
             <a:r>
               <a:rPr/>
-              <a:t>Frame the block: the 5-artifact set ships; capstone candidate declared. Set context briefly, then move into the teaching content.</a:t>
+              <a:t>Frame the block: the 5-artifact set ships; the Holocron brief is issued. Set context briefly, then move into the teaching content.</a:t>
             </a:r>
           </a:p>
         </p:txBody>
@@ -1035,7 +1035,7 @@
             </a:pPr>
             <a:r>
               <a:rPr/>
-              <a:t>Bring the discipline; pick a fresh subject.</a:t>
+              <a:t>Bring the discipline; the subject is handed to you.</a:t>
             </a:r>
           </a:p>
         </p:txBody>
@@ -1117,7 +1117,7 @@
             </a:pPr>
             <a:r>
               <a:rPr/>
-              <a:t>Push triads to declare. Vague candidates produce vague capstones.</a:t>
+              <a:t>Push triads to read closely, not to start solving. A vague read Friday becomes a vague PRD Tuesday.</a:t>
             </a:r>
           </a:p>
         </p:txBody>
@@ -1199,7 +1199,7 @@
             </a:pPr>
             <a:r>
               <a:rPr/>
-              <a:t>Wrap-share: experiment most excited about, sharpest DP insight, capstone candidate.</a:t>
+              <a:t>Wrap-share: experiment most excited about, sharpest DP insight, one-sentence Holocron problem.</a:t>
             </a:r>
           </a:p>
         </p:txBody>
@@ -1445,7 +1445,7 @@
             </a:pPr>
             <a:r>
               <a:rPr/>
-              <a:t>By 16:00, the DP is approved (or with gaps) and capstone candidate named.</a:t>
+              <a:t>By 16:00, the DP is approved (or with gaps) and the Holocron brief is read.</a:t>
             </a:r>
           </a:p>
         </p:txBody>
@@ -5821,7 +5821,7 @@
             </a:pPr>
             <a:r>
               <a:rPr b="1"/>
-              <a:t>The 5-artifact set ships; capstone candidate declared</a:t>
+              <a:t>The 5-artifact set ships; Holocron brief issued</a:t>
             </a:r>
           </a:p>
         </p:txBody>
@@ -5956,7 +5956,7 @@
             </a:pPr>
             <a:r>
               <a:rPr/>
-              <a:t>A capstone subject (FieldPulse or your own project)</a:t>
+              <a:t>The Holocron problem brief</a:t>
             </a:r>
           </a:p>
           <a:p>
@@ -6012,7 +6012,7 @@
             </a:pPr>
             <a:r>
               <a:rPr/>
-              <a:t>🎯 Pick Your Capstone Candidate</a:t>
+              <a:t>🎯 Read the Holocron Brief</a:t>
             </a:r>
           </a:p>
         </p:txBody>
@@ -6037,25 +6037,25 @@
             </a:pPr>
             <a:r>
               <a:rPr/>
-              <a:t>Each triad picks 3–5 candidates and declares a preferred one for Monday.</a:t>
-            </a:r>
-          </a:p>
-          <a:p>
-            <a:pPr lvl="0" indent="0" marL="0">
-              <a:buNone/>
-            </a:pPr>
-            <a:r>
-              <a:rPr/>
-              <a:t>Real product / feature from work, school, hobby, public</a:t>
-            </a:r>
-          </a:p>
-          <a:p>
-            <a:pPr lvl="0" indent="0" marL="0">
-              <a:buNone/>
-            </a:pPr>
-            <a:r>
-              <a:rPr/>
-              <a:t>Substantive enough for a week of work</a:t>
+              <a:t>Every triad gets the same problem. Read it Friday; do not start solving.</a:t>
+            </a:r>
+          </a:p>
+          <a:p>
+            <a:pPr lvl="0" indent="0" marL="0">
+              <a:buNone/>
+            </a:pPr>
+            <a:r>
+              <a:rPr/>
+              <a:t>The problem in one sentence, in your own words</a:t>
+            </a:r>
+          </a:p>
+          <a:p>
+            <a:pPr lvl="0" indent="0" marL="0">
+              <a:buNone/>
+            </a:pPr>
+            <a:r>
+              <a:rPr/>
+              <a:t>Who you think the primary user is</a:t>
             </a:r>
           </a:p>
           <a:p>
@@ -6120,7 +6120,7 @@
             </a:pPr>
             <a:r>
               <a:rPr/>
-              <a:t>👥 Activity 4 — Sign-Off + Capstone Candidate</a:t>
+              <a:t>👥 Activity 4 — Sign-Off + Holocron Brief</a:t>
             </a:r>
           </a:p>
         </p:txBody>
@@ -6166,7 +6166,7 @@
             </a:pPr>
             <a:r>
               <a:rPr/>
-              <a:t>15 min: brainstorm 3–5 capstone candidates</a:t>
+              <a:t>15 min: read the Holocron brief — problem, primary user, first questions</a:t>
             </a:r>
           </a:p>
           <a:p>
@@ -6346,7 +6346,7 @@
             </a:pPr>
             <a:r>
               <a:rPr/>
-              <a:t>Capstone subject (FieldPulse or your own)</a:t>
+              <a:t>Holocron problem brief</a:t>
             </a:r>
           </a:p>
           <a:p>
@@ -6373,7 +6373,7 @@
             </a:pPr>
             <a:r>
               <a:rPr/>
-              <a:t>Bring to Monday: All 5 sibling artifacts (PRD/TCD/TMD/SEP/DP) + your declared capstone candidate.</a:t>
+              <a:t>Bring to Monday: All 5 sibling artifacts (PRD/TCD/TMD/SEP/DP) + your one-sentence read of the Holocron problem.</a:t>
             </a:r>
           </a:p>
         </p:txBody>
@@ -6631,7 +6631,7 @@
             </a:pPr>
             <a:r>
               <a:rPr/>
-              <a:t>Declare the Week-8 capstone candidate</a:t>
+              <a:t>Receive the Holocron capstone brief</a:t>
             </a:r>
           </a:p>
         </p:txBody>
@@ -6856,7 +6856,7 @@
             </a:pPr>
             <a:r>
               <a:rPr/>
-              <a:t>Sign-off + Week-8 candidate</a:t>
+              <a:t>Sign-off + Holocron brief</a:t>
             </a:r>
           </a:p>
         </p:txBody>

--- a/week-07/presentations/ppts/day-05-removing-delivery-bottlenecks.pptx
+++ b/week-07/presentations/ppts/day-05-removing-delivery-bottlenecks.pptx
@@ -7087,6 +7087,31 @@
         <p:txBody>
           <a:bodyPr/>
           <a:lstStyle/>
+          <a:p>
+            <a:pPr lvl="0" indent="0">
+              <a:buNone/>
+            </a:pPr>
+            <a:r>
+              <a:rPr>
+                <a:latin typeface="Courier"/>
+              </a:rPr>
+              <a:t>### Experiment N: &lt;name&gt;
+**Bottleneck addressed:** &lt;queue&gt;
+**Hypothesis:** We believe that &lt;X&gt; will &lt;result&gt;
+because &lt;reasoning&gt;.
+**Test:** &lt;what / how long / what scope&gt;
+**Success criterion:**
+- Baseline: &lt;current&gt;
+- Target: &lt;improved&gt;
+- Window: &lt;duration&gt;
+**What could go wrong:** 2–3 risks
+**Who runs it:** named person
+**By when:** date
+**Decision after:**
+- Met: adopt / scale / institutionalize
+- Not met: abandon / iterate / escalate</a:t>
+            </a:r>
+          </a:p>
           <a:p>
             <a:pPr lvl="0" indent="0" marL="0">
               <a:buNone/>

--- a/week-07/presentations/ppts/day-05-removing-delivery-bottlenecks.pptx
+++ b/week-07/presentations/ppts/day-05-removing-delivery-bottlenecks.pptx
@@ -1117,7 +1117,7 @@
             </a:pPr>
             <a:r>
               <a:rPr/>
-              <a:t>Push triads to read closely, not to start solving. A vague read Friday becomes a vague PRD Tuesday.</a:t>
+              <a:t>Push quads to read closely, not to start solving. A vague read Friday becomes a vague PRD Tuesday.</a:t>
             </a:r>
           </a:p>
         </p:txBody>
@@ -1281,7 +1281,7 @@
             </a:pPr>
             <a:r>
               <a:rPr/>
-              <a:t>Public read-aloud: facilitator names one experiment from each triad.</a:t>
+              <a:t>Public read-aloud: facilitator names one experiment from each quad.</a:t>
             </a:r>
           </a:p>
         </p:txBody>
@@ -5317,7 +5317,7 @@
             </a:pPr>
             <a:r>
               <a:rPr b="1"/>
-              <a:t>Triads • 40 minutes</a:t>
+              <a:t>Quads • 40 minutes</a:t>
             </a:r>
           </a:p>
           <a:p>
@@ -5701,7 +5701,7 @@
             </a:pPr>
             <a:r>
               <a:rPr b="1"/>
-              <a:t>Triad pairs • 40 minutes</a:t>
+              <a:t>Quad pairs • 40 minutes</a:t>
             </a:r>
           </a:p>
           <a:p>
@@ -5728,7 +5728,7 @@
             </a:pPr>
             <a:r>
               <a:rPr/>
-              <a:t>10 min: author triad responds</a:t>
+              <a:t>10 min: author quad responds</a:t>
             </a:r>
           </a:p>
           <a:p>
@@ -6037,7 +6037,7 @@
             </a:pPr>
             <a:r>
               <a:rPr/>
-              <a:t>Every triad gets the same problem. Read it Friday; do not start solving.</a:t>
+              <a:t>Every quad gets the same problem. Read it Friday; do not start solving.</a:t>
             </a:r>
           </a:p>
           <a:p>
@@ -6148,7 +6148,7 @@
             </a:pPr>
             <a:r>
               <a:rPr b="1"/>
-              <a:t>Triads • 45 minutes • Wrap</a:t>
+              <a:t>Quads • 45 minutes • Wrap</a:t>
             </a:r>
           </a:p>
           <a:p>
@@ -7193,7 +7193,7 @@
             </a:pPr>
             <a:r>
               <a:rPr b="1"/>
-              <a:t>Triads • 35 minutes</a:t>
+              <a:t>Quads • 35 minutes</a:t>
             </a:r>
           </a:p>
           <a:p>

--- a/week-07/presentations/ppts/day-05-removing-delivery-bottlenecks.pptx
+++ b/week-07/presentations/ppts/day-05-removing-delivery-bottlenecks.pptx
@@ -5317,7 +5317,7 @@
             </a:pPr>
             <a:r>
               <a:rPr b="1"/>
-              <a:t>Quads • 40 minutes</a:t>
+              <a:t>Quads • 50 minutes</a:t>
             </a:r>
           </a:p>
           <a:p>
@@ -5701,7 +5701,7 @@
             </a:pPr>
             <a:r>
               <a:rPr b="1"/>
-              <a:t>Quad pairs • 40 minutes</a:t>
+              <a:t>Quad pairs • 50 minutes</a:t>
             </a:r>
           </a:p>
           <a:p>
@@ -6148,7 +6148,7 @@
             </a:pPr>
             <a:r>
               <a:rPr b="1"/>
-              <a:t>Quads • 45 minutes • Wrap</a:t>
+              <a:t>Quads • 55 minutes • Wrap</a:t>
             </a:r>
           </a:p>
           <a:p>
@@ -7193,7 +7193,7 @@
             </a:pPr>
             <a:r>
               <a:rPr b="1"/>
-              <a:t>Quads • 35 minutes</a:t>
+              <a:t>Quads • 45 minutes</a:t>
             </a:r>
           </a:p>
           <a:p>

--- a/week-07/presentations/ppts/day-05-removing-delivery-bottlenecks.pptx
+++ b/week-07/presentations/ppts/day-05-removing-delivery-bottlenecks.pptx
@@ -5326,7 +5326,7 @@
             </a:pPr>
             <a:r>
               <a:rPr/>
-              <a:t>15 min: solo read-through</a:t>
+              <a:t>25 min: solo read-through</a:t>
             </a:r>
           </a:p>
           <a:p>
@@ -5353,7 +5353,7 @@
             </a:pPr>
             <a:r>
               <a:rPr/>
-              <a:t>⏱ 15 + 10 + 15</a:t>
+              <a:t>⏱ 25 + 10 + 15</a:t>
             </a:r>
           </a:p>
         </p:txBody>
@@ -5719,7 +5719,7 @@
             </a:pPr>
             <a:r>
               <a:rPr/>
-              <a:t>20 min: cross-read with rubric</a:t>
+              <a:t>30 min: cross-read with rubric</a:t>
             </a:r>
           </a:p>
           <a:p>
@@ -5746,7 +5746,7 @@
             </a:pPr>
             <a:r>
               <a:rPr/>
-              <a:t>⏱ 5 + 20 + 10 + 5</a:t>
+              <a:t>⏱ 5 + 30 + 10 + 5</a:t>
             </a:r>
           </a:p>
         </p:txBody>
@@ -6166,7 +6166,7 @@
             </a:pPr>
             <a:r>
               <a:rPr/>
-              <a:t>15 min: read the Holocron brief — problem, primary user, first questions</a:t>
+              <a:t>30 min: read the Holocron brief — problem, primary user, first questions</a:t>
             </a:r>
           </a:p>
           <a:p>
@@ -6193,7 +6193,7 @@
             </a:pPr>
             <a:r>
               <a:rPr/>
-              <a:t>⏱ 10 + 15 + 10 + 5 · 15-min wrap</a:t>
+              <a:t>⏱ 10 + 30 + 10 + 5 · 15-min wrap</a:t>
             </a:r>
           </a:p>
         </p:txBody>
@@ -7211,7 +7211,7 @@
             </a:pPr>
             <a:r>
               <a:rPr/>
-              <a:t>25 min: draft 3 experiments (template)</a:t>
+              <a:t>35 min: draft 3 experiments (template)</a:t>
             </a:r>
           </a:p>
           <a:p>
@@ -7229,7 +7229,7 @@
             </a:pPr>
             <a:r>
               <a:rPr/>
-              <a:t>⏱ 5 + 25 + 5</a:t>
+              <a:t>⏱ 5 + 35 + 5</a:t>
             </a:r>
           </a:p>
         </p:txBody>
